--- a/examples/hello-table/fixtures/deck.msoffice-flow-resaved.pptx
+++ b/examples/hello-table/fixtures/deck.msoffice-flow-resaved.pptx
@@ -172,7 +172,7 @@
           </c:val>
           <c:extLst>
             <c:ext xmlns:c16="http://schemas.microsoft.com/office/drawing/2014/chart" uri="{C3380CC4-5D6E-409C-BE32-E72D297353CC}">
-              <c16:uniqueId val="{00000000-DFFA-6946-BF72-68F9644B176D}"/>
+              <c16:uniqueId val="{00000000-4630-9641-9887-FB3E81D4F6F1}"/>
             </c:ext>
           </c:extLst>
         </c:ser>
@@ -2997,7 +2997,7 @@
 
 <file path=ppt/slides/slide1.xml><?xml version="1.0" encoding="utf-8"?>
 <p:sld xmlns:a="http://schemas.openxmlformats.org/drawingml/2006/main" xmlns:r="http://schemas.openxmlformats.org/officeDocument/2006/relationships" xmlns:p="http://schemas.openxmlformats.org/presentationml/2006/main">
-  <p:cSld name="ox:flow-slide">
+  <p:cSld name="mleaf:flow-slide">
     <p:bg>
       <p:bgPr>
         <a:solidFill>
@@ -3022,7 +3022,7 @@
       </p:grpSpPr>
       <p:sp>
         <p:nvSpPr>
-          <p:cNvPr id="258" name="ox:flow-deck-title"/>
+          <p:cNvPr id="258" name="mleaf:flow-deck-title"/>
           <p:cNvSpPr txBox="1"/>
           <p:nvPr/>
         </p:nvSpPr>
@@ -3062,7 +3062,7 @@
       </p:sp>
       <p:graphicFrame>
         <p:nvGraphicFramePr>
-          <p:cNvPr id="259" name="ox:flow-deck-table"/>
+          <p:cNvPr id="259" name="mleaf:flow-deck-table"/>
           <p:cNvGraphicFramePr>
             <a:graphicFrameLocks noGrp="1"/>
           </p:cNvGraphicFramePr>
@@ -3256,7 +3256,7 @@
       </p:graphicFrame>
       <p:graphicFrame>
         <p:nvGraphicFramePr>
-          <p:cNvPr id="260" name="ox:flow-deck-chart"/>
+          <p:cNvPr id="260" name="mleaf:flow-deck-chart"/>
           <p:cNvGraphicFramePr>
             <a:graphicFrameLocks noGrp="1"/>
           </p:cNvGraphicFramePr>
